--- a/SIH2026_GeoIntel_Core_Data_Miners.pptx
+++ b/SIH2026_GeoIntel_Core_Data_Miners.pptx
@@ -5540,24 +5540,24 @@
         </p:nvSpPr>
         <p:spPr>
           <a:xfrm>
-            <a:off x="1245686" y="648614"/>
-            <a:ext cx="8534400" cy="1752600"/>
+            <a:off x="457200" y="594360"/>
+            <a:ext cx="5120640" cy="1280160"/>
           </a:xfrm>
         </p:spPr>
         <p:txBody>
-          <a:bodyPr/>
+          <a:bodyPr wrap="square"/>
           <a:lstStyle/>
           <a:p>
             <a:pPr algn="l">
-              <a:defRPr sz="1500" b="1">
-                <a:solidFill>
-                  <a:srgbClr val="0E7490"/>
+              <a:defRPr sz="2400" b="1">
+                <a:solidFill>
+                  <a:srgbClr val="1E3A8A"/>
                 </a:solidFill>
                 <a:latin typeface="Arial"/>
               </a:defRPr>
             </a:pPr>
             <a:r>
-              <a:t>GeoIntel Core : Autonomous Geological Intelligence &amp; Spatial Reporting Portal</a:t>
+              <a:t>GeoIntel Core</a:t>
             </a:r>
             <a:endParaRPr lang="en-US" b="1" dirty="0">
               <a:solidFill>
@@ -5567,6 +5567,22 @@
               <a:cs typeface="Times New Roman" panose="02020603050405020304" pitchFamily="18" charset="0"/>
             </a:endParaRPr>
           </a:p>
+          <a:p>
+            <a:pPr algn="l">
+              <a:spcBef>
+                <a:spcPts val="400"/>
+              </a:spcBef>
+              <a:defRPr sz="1300" b="1">
+                <a:solidFill>
+                  <a:srgbClr val="0E7490"/>
+                </a:solidFill>
+                <a:latin typeface="Arial"/>
+              </a:defRPr>
+            </a:pPr>
+            <a:r>
+              <a:t>Autonomous Geological Intelligence &amp; Spatial Reporting Portal</a:t>
+            </a:r>
+          </a:p>
         </p:txBody>
       </p:sp>
       <p:sp>
@@ -5624,8 +5640,8 @@
         </p:nvSpPr>
         <p:spPr>
           <a:xfrm>
-            <a:off x="331286" y="2076450"/>
-            <a:ext cx="5924550" cy="4703019"/>
+            <a:off x="457200" y="2057400"/>
+            <a:ext cx="5120640" cy="4389120"/>
           </a:xfrm>
           <a:prstGeom prst="rect">
             <a:avLst/>
@@ -5644,7 +5660,7 @@
               </a:spcAft>
             </a:pPr>
             <a:r>
-              <a:rPr sz="1400" b="1">
+              <a:rPr sz="1300" b="1">
                 <a:solidFill>
                   <a:srgbClr val="1E3A8A"/>
                 </a:solidFill>
@@ -5653,7 +5669,7 @@
               <a:t>Problem Statement ID : </a:t>
             </a:r>
             <a:r>
-              <a:rPr sz="1400" b="1">
+              <a:rPr sz="1300" b="1">
                 <a:solidFill>
                   <a:srgbClr val="1E293B"/>
                 </a:solidFill>
@@ -5670,7 +5686,7 @@
               </a:spcAft>
             </a:pPr>
             <a:r>
-              <a:rPr sz="1400" b="1">
+              <a:rPr sz="1300" b="1">
                 <a:solidFill>
                   <a:srgbClr val="1E3A8A"/>
                 </a:solidFill>
@@ -5679,13 +5695,13 @@
               <a:t>Problem Statement Title : </a:t>
             </a:r>
             <a:r>
-              <a:rPr sz="1400" b="0">
+              <a:rPr sz="1300" b="0">
                 <a:solidFill>
                   <a:srgbClr val="1E293B"/>
                 </a:solidFill>
                 <a:latin typeface="Arial"/>
               </a:rPr>
-              <a:t>AI-Powered Geological &amp; Mining Reporting Solution for CMPDI &amp; CIL</a:t>
+              <a:t>AI-Powered Geological &amp; Mining Reporting Solution</a:t>
             </a:r>
           </a:p>
           <a:p>
@@ -5695,7 +5711,7 @@
               </a:spcAft>
             </a:pPr>
             <a:r>
-              <a:rPr sz="1400" b="1">
+              <a:rPr sz="1300" b="1">
                 <a:solidFill>
                   <a:srgbClr val="1E3A8A"/>
                 </a:solidFill>
@@ -5704,13 +5720,13 @@
               <a:t>Theme : </a:t>
             </a:r>
             <a:r>
-              <a:rPr sz="1400" b="0">
+              <a:rPr sz="1300" b="0">
                 <a:solidFill>
                   <a:srgbClr val="1E293B"/>
                 </a:solidFill>
                 <a:latin typeface="Arial"/>
               </a:rPr>
-              <a:t>Clean &amp; Green Technology / Smart Automation &amp; Mining</a:t>
+              <a:t>Clean &amp; Green Technology / Smart Mining</a:t>
             </a:r>
           </a:p>
           <a:p>
@@ -5720,7 +5736,7 @@
               </a:spcAft>
             </a:pPr>
             <a:r>
-              <a:rPr sz="1400" b="1">
+              <a:rPr sz="1300" b="1">
                 <a:solidFill>
                   <a:srgbClr val="1E3A8A"/>
                 </a:solidFill>
@@ -5729,7 +5745,7 @@
               <a:t>PS Category : </a:t>
             </a:r>
             <a:r>
-              <a:rPr sz="1400" b="0">
+              <a:rPr sz="1300" b="0">
                 <a:solidFill>
                   <a:srgbClr val="1E293B"/>
                 </a:solidFill>
@@ -5745,7 +5761,7 @@
               </a:spcAft>
             </a:pPr>
             <a:r>
-              <a:rPr sz="1400" b="1">
+              <a:rPr sz="1300" b="1">
                 <a:solidFill>
                   <a:srgbClr val="1E3A8A"/>
                 </a:solidFill>
@@ -5754,7 +5770,7 @@
               <a:t>Team ID : </a:t>
             </a:r>
             <a:r>
-              <a:rPr sz="1400" b="0">
+              <a:rPr sz="1300" b="0">
                 <a:solidFill>
                   <a:srgbClr val="1E293B"/>
                 </a:solidFill>
@@ -5770,7 +5786,7 @@
               </a:spcAft>
             </a:pPr>
             <a:r>
-              <a:rPr sz="1400" b="1">
+              <a:rPr sz="1300" b="1">
                 <a:solidFill>
                   <a:srgbClr val="1E3A8A"/>
                 </a:solidFill>
@@ -5779,13 +5795,13 @@
               <a:t>Team Name : </a:t>
             </a:r>
             <a:r>
-              <a:rPr sz="1400" b="1">
+              <a:rPr sz="1300" b="1">
                 <a:solidFill>
                   <a:srgbClr val="C2410C"/>
                 </a:solidFill>
                 <a:latin typeface="Arial"/>
               </a:rPr>
-              <a:t>Data Miners (Registered on Portal)</a:t>
+              <a:t>data_miners</a:t>
             </a:r>
           </a:p>
         </p:txBody>
@@ -5924,7 +5940,7 @@
           <a:lstStyle/>
           <a:p>
             <a:pPr eaLnBrk="1" hangingPunct="1" algn="l">
-              <a:defRPr sz="2200" b="1">
+              <a:defRPr sz="2000" b="1">
                 <a:solidFill>
                   <a:srgbClr val="1E3A8A"/>
                 </a:solidFill>
@@ -6059,7 +6075,7 @@
               </a:defRPr>
             </a:pPr>
             <a:r>
-              <a:t>Data Miners</a:t>
+              <a:t>data_miners</a:t>
             </a:r>
             <a:endParaRPr lang="en-IN" dirty="0"/>
           </a:p>
@@ -6142,13 +6158,13 @@
               </a:spcAft>
             </a:pPr>
             <a:r>
-              <a:rPr sz="1000">
+              <a:rPr sz="950">
                 <a:solidFill>
                   <a:srgbClr val="334155"/>
                 </a:solidFill>
                 <a:latin typeface="Arial"/>
               </a:rPr>
-              <a:t>• Full-stack multimodal intelligence system tailored for CMPDI borehole logs, Detailed Project Reports (DPRs), and CIL operational archives.</a:t>
+              <a:t>• Autonomous multimodal system for CMPDI borehole logs, Detailed Project Reports (DPRs), and CIL production data.</a:t>
             </a:r>
           </a:p>
           <a:p>
@@ -6158,13 +6174,13 @@
               </a:spcAft>
             </a:pPr>
             <a:r>
-              <a:rPr sz="1000">
+              <a:rPr sz="950">
                 <a:solidFill>
                   <a:srgbClr val="334155"/>
                 </a:solidFill>
                 <a:latin typeface="Arial"/>
               </a:rPr>
-              <a:t>• Live working prototype featuring dual-pane split-screen spatial verification and autonomous multi-format report synthesis.</a:t>
+              <a:t>• Functional split-screen prototype with real-time PyMuPDF spatial coordinate auditing.</a:t>
             </a:r>
           </a:p>
           <a:p>
@@ -6183,7 +6199,7 @@
                 </a:solidFill>
                 <a:latin typeface="Arial"/>
               </a:rPr>
-              <a:t>Detailed Explanation of Proposed Solution:</a:t>
+              <a:t>Core Engineering Capabilities:</a:t>
             </a:r>
           </a:p>
           <a:p>
@@ -6193,13 +6209,13 @@
               </a:spcAft>
             </a:pPr>
             <a:r>
-              <a:rPr sz="1000">
+              <a:rPr sz="950">
                 <a:solidFill>
                   <a:srgbClr val="334155"/>
                 </a:solidFill>
                 <a:latin typeface="Arial"/>
               </a:rPr>
-              <a:t>• PyMuPDF Coordinate Engine: Parses multi-hundred page mining PDFs into precise normalized bounding-box coordinates [x0, y0, x1, y1].</a:t>
+              <a:t>• Spatial Vector Grounding: Extracts [x0, y0, x1, y1] coordinates per token for 100% auditable citations.</a:t>
             </a:r>
           </a:p>
           <a:p>
@@ -6209,13 +6225,45 @@
               </a:spcAft>
             </a:pPr>
             <a:r>
-              <a:rPr sz="1000">
+              <a:rPr sz="950">
                 <a:solidFill>
                   <a:srgbClr val="334155"/>
                 </a:solidFill>
                 <a:latin typeface="Arial"/>
               </a:rPr>
-              <a:t>• ChromaDB Spatial Store: 384-dimensional dense semantic vector representations indexed by CIL subsidiary, year, and mining horizon.</a:t>
+              <a:t>• Dynamic View Synchronization: Citation bounding boxes update live on page navigation.</a:t>
+            </a:r>
+          </a:p>
+          <a:p>
+            <a:pPr lvl="1">
+              <a:spcAft>
+                <a:spcPts val="200"/>
+              </a:spcAft>
+            </a:pPr>
+            <a:r>
+              <a:rPr sz="950">
+                <a:solidFill>
+                  <a:srgbClr val="334155"/>
+                </a:solidFill>
+                <a:latin typeface="Arial"/>
+              </a:rPr>
+              <a:t>• Autonomous Report Studio: Synthesizes executive briefs &amp; DOCX files following custom engineering directives.</a:t>
+            </a:r>
+          </a:p>
+          <a:p>
+            <a:pPr lvl="1">
+              <a:spcAft>
+                <a:spcPts val="200"/>
+              </a:spcAft>
+            </a:pPr>
+            <a:r>
+              <a:rPr sz="950">
+                <a:solidFill>
+                  <a:srgbClr val="334155"/>
+                </a:solidFill>
+                <a:latin typeface="Arial"/>
+              </a:rPr>
+              <a:t>• Pan-CIL Production Analytics: Benchmarks coal extraction, stripping ratios, and OBR across 8 subsidiaries.</a:t>
             </a:r>
           </a:p>
           <a:p>
@@ -6234,7 +6282,7 @@
                 </a:solidFill>
                 <a:latin typeface="Arial"/>
               </a:rPr>
-              <a:t>How It Directly Addresses the CMPDI/CIL Problem:</a:t>
+              <a:t>Problem Addressed &amp; Innovation:</a:t>
             </a:r>
           </a:p>
           <a:p>
@@ -6244,13 +6292,13 @@
               </a:spcAft>
             </a:pPr>
             <a:r>
-              <a:rPr sz="1000">
+              <a:rPr sz="950">
                 <a:solidFill>
                   <a:srgbClr val="334155"/>
                 </a:solidFill>
                 <a:latin typeface="Arial"/>
               </a:rPr>
-              <a:t>• Replaces weeks of manual cross-referencing with sub-second, auditable retrieval across 100+ official reports.</a:t>
+              <a:t>• Replaces manual multi-week PDF cross-referencing with sub-second verified semantic retrieval.</a:t>
             </a:r>
           </a:p>
           <a:p>
@@ -6260,64 +6308,13 @@
               </a:spcAft>
             </a:pPr>
             <a:r>
-              <a:rPr sz="1000">
+              <a:rPr sz="950">
                 <a:solidFill>
                   <a:srgbClr val="334155"/>
                 </a:solidFill>
                 <a:latin typeface="Arial"/>
               </a:rPr>
-              <a:t>• Eliminates hallucination risk: Every metric is linked to an exact source page and visual bounding-box snippet.</a:t>
-            </a:r>
-          </a:p>
-          <a:p>
-            <a:pPr>
-              <a:spcBef>
-                <a:spcPts val="400"/>
-              </a:spcBef>
-              <a:spcAft>
-                <a:spcPts val="200"/>
-              </a:spcAft>
-            </a:pPr>
-            <a:r>
-              <a:rPr sz="1200" b="1">
-                <a:solidFill>
-                  <a:srgbClr val="1E3A8A"/>
-                </a:solidFill>
-                <a:latin typeface="Arial"/>
-              </a:rPr>
-              <a:t>Innovation &amp; Uniqueness:</a:t>
-            </a:r>
-          </a:p>
-          <a:p>
-            <a:pPr lvl="1">
-              <a:spcAft>
-                <a:spcPts val="200"/>
-              </a:spcAft>
-            </a:pPr>
-            <a:r>
-              <a:rPr sz="1000">
-                <a:solidFill>
-                  <a:srgbClr val="334155"/>
-                </a:solidFill>
-                <a:latin typeface="Arial"/>
-              </a:rPr>
-              <a:t>• Zero Token Waste Architecture: Smart token budgeting (2200 tokens) with resilient Groq LPU hardware acceleration &amp; offline fallback.</a:t>
-            </a:r>
-          </a:p>
-          <a:p>
-            <a:pPr lvl="1">
-              <a:spcAft>
-                <a:spcPts val="200"/>
-              </a:spcAft>
-            </a:pPr>
-            <a:r>
-              <a:rPr sz="1000">
-                <a:solidFill>
-                  <a:srgbClr val="334155"/>
-                </a:solidFill>
-                <a:latin typeface="Arial"/>
-              </a:rPr>
-              <a:t>• Dynamic Citation Highlighting: Real-time bounding box overlays that adapt on page navigation.</a:t>
+              <a:t>• Zero Hallucination Guarantee: Every assertion is bound to verifiable text in official government documents.</a:t>
             </a:r>
           </a:p>
         </p:txBody>
@@ -6620,7 +6617,7 @@
               </a:defRPr>
             </a:pPr>
             <a:r>
-              <a:t>Data Miners</a:t>
+              <a:t>data_miners</a:t>
             </a:r>
             <a:endParaRPr lang="en-IN" dirty="0"/>
           </a:p>
@@ -6709,7 +6706,7 @@
                 </a:solidFill>
                 <a:latin typeface="Arial"/>
               </a:rPr>
-              <a:t>• Frontend Architecture: React 18, Vite, Tailwind CSS, Lucide Icons, Glassmorphic UI with dynamic SVG spatial bounding-box overlay.</a:t>
+              <a:t>• Frontend: React 18, Vite, Tailwind CSS, Lucide Icons, dynamic SVG coordinate overlays.</a:t>
             </a:r>
           </a:p>
           <a:p>
@@ -6725,7 +6722,7 @@
                 </a:solidFill>
                 <a:latin typeface="Arial"/>
               </a:rPr>
-              <a:t>• Backend &amp; API Services: FastAPI, Python 3.12, Uvicorn, Asynchronous REST endpoints, multipart streaming PDF ingestion.</a:t>
+              <a:t>• Backend API: FastAPI, Python 3.12, Uvicorn, asynchronous multipart streaming endpoints.</a:t>
             </a:r>
           </a:p>
           <a:p>
@@ -6741,7 +6738,7 @@
                 </a:solidFill>
                 <a:latin typeface="Arial"/>
               </a:rPr>
-              <a:t>• Spatial Text Extraction: PyMuPDF (Fitz) token-level coordinate parser preserving page geometry and tabular bounding boxes.</a:t>
+              <a:t>• Spatial Extraction: PyMuPDF (Fitz) token parser preserving geometry &amp; table bounding boxes.</a:t>
             </a:r>
           </a:p>
           <a:p>
@@ -6757,7 +6754,7 @@
                 </a:solidFill>
                 <a:latin typeface="Arial"/>
               </a:rPr>
-              <a:t>• Semantic Vector Database: ChromaDB persistent vector store with All-MiniLM-L6-v2 384-dimensional dense embeddings.</a:t>
+              <a:t>• Vector Database: ChromaDB persistent vector store with 384-dim dense embeddings.</a:t>
             </a:r>
           </a:p>
           <a:p>
@@ -6773,7 +6770,7 @@
                 </a:solidFill>
                 <a:latin typeface="Arial"/>
               </a:rPr>
-              <a:t>• LLM &amp; Inference Hardware: Groq LPU Hardware Acceleration (Meta LLaMA 3.3 70B &amp; Qwen 2.5 32B), Local Hybrid extractive fallback.</a:t>
+              <a:t>• Inference Hardware: Groq LPU Hardware Acceleration (LLaMA 3.3 70B &amp; Qwen 2.5 32B).</a:t>
             </a:r>
           </a:p>
           <a:p>
@@ -6789,7 +6786,7 @@
                 </a:solidFill>
                 <a:latin typeface="Arial"/>
               </a:rPr>
-              <a:t>• Multi-Format Document Engine: ReportLab PDF engine (inline browser preview), python-docx table compiler, Markdown generator.</a:t>
+              <a:t>• Multi-Format Synthesis: ReportLab PDF engine, python-docx compiler, Markdown exporter.</a:t>
             </a:r>
           </a:p>
           <a:p>
@@ -6824,7 +6821,7 @@
                 </a:solidFill>
                 <a:latin typeface="Arial"/>
               </a:rPr>
-              <a:t>• 1. Multimodal Harvester: Ministry of Coal web scraper &amp; instant drag-and-drop ingestion with automatic file versioning (_v2.pdf).</a:t>
+              <a:t>• 1. Harvester: Ministry of Coal web scraper &amp; instant drag-and-drop document ingestion.</a:t>
             </a:r>
           </a:p>
           <a:p>
@@ -6840,7 +6837,7 @@
                 </a:solidFill>
                 <a:latin typeface="Arial"/>
               </a:rPr>
-              <a:t>• 2. Spatial Indexing: Sliding-window chunking (400 words, 50-word overlap) retaining exact pixel bounding coordinates.</a:t>
+              <a:t>• 2. Spatial Indexing: Sliding-window chunking retaining exact pixel bounding coordinates.</a:t>
             </a:r>
           </a:p>
           <a:p>
@@ -6856,7 +6853,7 @@
                 </a:solidFill>
                 <a:latin typeface="Arial"/>
               </a:rPr>
-              <a:t>• 3. Grounded Retrieval: Filtered hybrid search combining dense vector similarity with inverted domain keyword indices.</a:t>
+              <a:t>• 3. Grounded Retrieval: Hybrid search combining dense vectors with inverted keyword indices.</a:t>
             </a:r>
           </a:p>
           <a:p>
@@ -6872,7 +6869,7 @@
                 </a:solidFill>
                 <a:latin typeface="Arial"/>
               </a:rPr>
-              <a:t>• 4. Resilient Synthesis: Rate-limit resilient inference with smart token budgeting and 100% spatial citation provenance.</a:t>
+              <a:t>• 4. Resilient Synthesis: Dynamic token budgeting with local extractive fallback.</a:t>
             </a:r>
           </a:p>
         </p:txBody>
@@ -6932,7 +6929,7 @@
               </a:defRPr>
             </a:pPr>
             <a:r>
-              <a:t>Figure 2: GeoIntel Core End-to-End 4-Stage Multimodal Architecture (Designed by Team Data Miners)</a:t>
+              <a:t>Figure 2: GeoIntel Core End-to-End 4-Stage Multimodal Architecture (Team data_miners)</a:t>
             </a:r>
           </a:p>
         </p:txBody>
@@ -7273,7 +7270,7 @@
               </a:defRPr>
             </a:pPr>
             <a:r>
-              <a:t>Data Miners</a:t>
+              <a:t>data_miners</a:t>
             </a:r>
             <a:endParaRPr lang="en-IN" dirty="0"/>
           </a:p>
@@ -7333,7 +7330,7 @@
           <a:p>
             <a:pPr>
               <a:spcBef>
-                <a:spcPts val="400"/>
+                <a:spcPts val="500"/>
               </a:spcBef>
               <a:spcAft>
                 <a:spcPts val="200"/>
@@ -7346,17 +7343,17 @@
                 </a:solidFill>
                 <a:latin typeface="Arial"/>
               </a:rPr>
-              <a:t>Analysis of Feasibility &amp; Production Scalability:</a:t>
+              <a:t>Feasibility &amp; Operational Viability:</a:t>
             </a:r>
           </a:p>
           <a:p>
             <a:pPr lvl="1">
               <a:spcAft>
-                <a:spcPts val="200"/>
+                <a:spcPts val="300"/>
               </a:spcAft>
             </a:pPr>
             <a:r>
-              <a:rPr sz="1000">
+              <a:rPr sz="950">
                 <a:solidFill>
                   <a:srgbClr val="334155"/>
                 </a:solidFill>
@@ -7368,55 +7365,55 @@
           <a:p>
             <a:pPr lvl="1">
               <a:spcAft>
-                <a:spcPts val="200"/>
+                <a:spcPts val="300"/>
               </a:spcAft>
             </a:pPr>
             <a:r>
-              <a:rPr sz="1000">
+              <a:rPr sz="950">
                 <a:solidFill>
                   <a:srgbClr val="334155"/>
                 </a:solidFill>
                 <a:latin typeface="Arial"/>
               </a:rPr>
-              <a:t>• Sub-second vector indexing: High-throughput ingestion processes 50-page complex DPRs in under 3.2 seconds.</a:t>
+              <a:t>• Sub-second vector indexing: Parses 50-page complex DPRs in under 3.2 seconds.</a:t>
             </a:r>
           </a:p>
           <a:p>
             <a:pPr lvl="1">
               <a:spcAft>
-                <a:spcPts val="200"/>
+                <a:spcPts val="300"/>
               </a:spcAft>
             </a:pPr>
             <a:r>
-              <a:rPr sz="1000">
+              <a:rPr sz="950">
                 <a:solidFill>
                   <a:srgbClr val="334155"/>
                 </a:solidFill>
                 <a:latin typeface="Arial"/>
               </a:rPr>
-              <a:t>• Enterprise Deployment: Containerized FastAPI &amp; React microservices ready for secure on-premises CIL deployment or cloud nodes.</a:t>
+              <a:t>• Enterprise Deployment: Containerized microservices ready for secure on-premises CIL servers.</a:t>
             </a:r>
           </a:p>
           <a:p>
             <a:pPr lvl="1">
               <a:spcAft>
-                <a:spcPts val="200"/>
+                <a:spcPts val="300"/>
               </a:spcAft>
             </a:pPr>
             <a:r>
-              <a:rPr sz="1000">
+              <a:rPr sz="950">
                 <a:solidFill>
                   <a:srgbClr val="334155"/>
                 </a:solidFill>
                 <a:latin typeface="Arial"/>
               </a:rPr>
-              <a:t>• Data Sovereignty: 100% on-premises vector storage with zero external data exposure of confidential exploration reserves.</a:t>
+              <a:t>• 100% Data Sovereignty: Zero external data exposure of confidential exploration reserves.</a:t>
             </a:r>
           </a:p>
           <a:p>
             <a:pPr>
               <a:spcBef>
-                <a:spcPts val="400"/>
+                <a:spcPts val="500"/>
               </a:spcBef>
               <a:spcAft>
                 <a:spcPts val="200"/>
@@ -7429,106 +7426,55 @@
                 </a:solidFill>
                 <a:latin typeface="Arial"/>
               </a:rPr>
-              <a:t>Potential Challenges &amp; Operational Risks:</a:t>
+              <a:t>Operational Challenges &amp; Mitigations:</a:t>
             </a:r>
           </a:p>
           <a:p>
             <a:pPr lvl="1">
               <a:spcAft>
-                <a:spcPts val="200"/>
+                <a:spcPts val="300"/>
               </a:spcAft>
             </a:pPr>
             <a:r>
-              <a:rPr sz="1000">
+              <a:rPr sz="950">
                 <a:solidFill>
                   <a:srgbClr val="334155"/>
                 </a:solidFill>
                 <a:latin typeface="Arial"/>
               </a:rPr>
-              <a:t>• Hardware API Rate Limiting: LLM token rate limits (TPM/RPM) during intensive multi-department reporting sessions.</a:t>
+              <a:t>• API Rate Limiting: Resilient token budgeting (2200 max tokens) with exponential backoff retry.</a:t>
             </a:r>
           </a:p>
           <a:p>
             <a:pPr lvl="1">
               <a:spcAft>
-                <a:spcPts val="200"/>
+                <a:spcPts val="300"/>
               </a:spcAft>
             </a:pPr>
             <a:r>
-              <a:rPr sz="1000">
+              <a:rPr sz="950">
                 <a:solidFill>
                   <a:srgbClr val="334155"/>
                 </a:solidFill>
                 <a:latin typeface="Arial"/>
               </a:rPr>
-              <a:t>• Heterogeneous Legacy Archives: Complex multi-column tables, scanned geological boreholes, and unstandardized subsidiary formats.</a:t>
-            </a:r>
-          </a:p>
-          <a:p>
-            <a:pPr>
-              <a:spcBef>
-                <a:spcPts val="400"/>
-              </a:spcBef>
+              <a:t>• Network Outage Tolerance: Local extractive fallback ensures zero system downtime.</a:t>
+            </a:r>
+          </a:p>
+          <a:p>
+            <a:pPr lvl="1">
               <a:spcAft>
-                <a:spcPts val="200"/>
+                <a:spcPts val="300"/>
               </a:spcAft>
             </a:pPr>
             <a:r>
-              <a:rPr sz="1200" b="1">
-                <a:solidFill>
-                  <a:srgbClr val="1E3A8A"/>
+              <a:rPr sz="950">
+                <a:solidFill>
+                  <a:srgbClr val="334155"/>
                 </a:solidFill>
                 <a:latin typeface="Arial"/>
               </a:rPr>
-              <a:t>Strategies for Overcoming Challenges:</a:t>
-            </a:r>
-          </a:p>
-          <a:p>
-            <a:pPr lvl="1">
-              <a:spcAft>
-                <a:spcPts val="200"/>
-              </a:spcAft>
-            </a:pPr>
-            <a:r>
-              <a:rPr sz="1000">
-                <a:solidFill>
-                  <a:srgbClr val="334155"/>
-                </a:solidFill>
-                <a:latin typeface="Arial"/>
-              </a:rPr>
-              <a:t>• Rate-Limit Resiliency Engine: Dynamic token budgeting (2200 max tokens) with exponential backoff retry logic.</a:t>
-            </a:r>
-          </a:p>
-          <a:p>
-            <a:pPr lvl="1">
-              <a:spcAft>
-                <a:spcPts val="200"/>
-              </a:spcAft>
-            </a:pPr>
-            <a:r>
-              <a:rPr sz="1000">
-                <a:solidFill>
-                  <a:srgbClr val="334155"/>
-                </a:solidFill>
-                <a:latin typeface="Arial"/>
-              </a:rPr>
-              <a:t>• Graceful Hybrid Extractive Fallback: Autonomous fallback to local extractive ranking engine ensuring zero system downtime.</a:t>
-            </a:r>
-          </a:p>
-          <a:p>
-            <a:pPr lvl="1">
-              <a:spcAft>
-                <a:spcPts val="200"/>
-              </a:spcAft>
-            </a:pPr>
-            <a:r>
-              <a:rPr sz="1000">
-                <a:solidFill>
-                  <a:srgbClr val="334155"/>
-                </a:solidFill>
-                <a:latin typeface="Arial"/>
-              </a:rPr>
-              <a:t>• PyMuPDF Geometric Normalization: Exact token-level coordinate bounding boxes adapt seamlessly across diverse page aspect ratios.</a:t>
+              <a:t>• Heterogeneous Archives: PyMuPDF token normalization adapts to any PDF format or scan geometry.</a:t>
             </a:r>
           </a:p>
         </p:txBody>
@@ -7588,7 +7534,7 @@
               </a:defRPr>
             </a:pPr>
             <a:r>
-              <a:t>Figure 3: Official Document Repository &amp; Ingestion Hub (ChromaDB Vector Indexing &amp; Real-Time Upload)</a:t>
+              <a:t>Figure 3: Official Document Repository &amp; Ingestion Hub (ChromaDB Vector Indexing &amp; Live Scraper)</a:t>
             </a:r>
           </a:p>
         </p:txBody>
@@ -7934,7 +7880,7 @@
               </a:defRPr>
             </a:pPr>
             <a:r>
-              <a:t>Data Miners</a:t>
+              <a:t>data_miners</a:t>
             </a:r>
             <a:endParaRPr lang="en-IN" dirty="0"/>
           </a:p>
@@ -8007,55 +7953,55 @@
                 </a:solidFill>
                 <a:latin typeface="Arial"/>
               </a:rPr>
-              <a:t>Impact on Target Stakeholders (CMPDI &amp; Coal India):</a:t>
+              <a:t>Direct Impact on Target Stakeholders:</a:t>
             </a:r>
           </a:p>
           <a:p>
             <a:pPr lvl="1">
               <a:spcAft>
-                <a:spcPts val="200"/>
+                <a:spcPts val="300"/>
               </a:spcAft>
             </a:pPr>
             <a:r>
-              <a:rPr sz="1000">
+              <a:rPr sz="950">
                 <a:solidFill>
                   <a:srgbClr val="334155"/>
                 </a:solidFill>
                 <a:latin typeface="Arial"/>
               </a:rPr>
-              <a:t>• CMPDI Geologists &amp; Drilling Engineers: Instant lookup of Gondwana stratigraphy, Barakar formations, and regional borehole meterage (RI-I to RI-VII).</a:t>
+              <a:t>• CMPDI Geologists: Instant lookup of Gondwana stratigraphy, Barakar formations, and regional meterage.</a:t>
             </a:r>
           </a:p>
           <a:p>
             <a:pPr lvl="1">
               <a:spcAft>
-                <a:spcPts val="200"/>
+                <a:spcPts val="300"/>
               </a:spcAft>
             </a:pPr>
             <a:r>
-              <a:rPr sz="1000">
+              <a:rPr sz="950">
                 <a:solidFill>
                   <a:srgbClr val="334155"/>
                 </a:solidFill>
                 <a:latin typeface="Arial"/>
               </a:rPr>
-              <a:t>• Mine General Managers &amp; Planning Officers: Real-time benchmarking of Overburden Removal (OBR), stripping ratios (m³/t), and heavy equipment productivity.</a:t>
+              <a:t>• Mine Planning Officers: Real-time tracking of Overburden Removal (OBR), stripping ratios, and productivity.</a:t>
             </a:r>
           </a:p>
           <a:p>
             <a:pPr lvl="1">
               <a:spcAft>
-                <a:spcPts val="200"/>
+                <a:spcPts val="300"/>
               </a:spcAft>
             </a:pPr>
             <a:r>
-              <a:rPr sz="1000">
+              <a:rPr sz="950">
                 <a:solidFill>
                   <a:srgbClr val="334155"/>
                 </a:solidFill>
                 <a:latin typeface="Arial"/>
               </a:rPr>
-              <a:t>• Ministry of Coal &amp; CIL Leadership: Automated generation of board-level performance summaries, reducing preparation cycles from weeks to minutes.</a:t>
+              <a:t>• Ministry of Coal Leadership: Board-level summaries compiled in minutes rather than weeks.</a:t>
             </a:r>
           </a:p>
           <a:p>
@@ -8074,71 +8020,71 @@
                 </a:solidFill>
                 <a:latin typeface="Arial"/>
               </a:rPr>
-              <a:t>Comprehensive Benefits of GeoIntel Core:</a:t>
+              <a:t>Quantifiable Strategic Benefits:</a:t>
             </a:r>
           </a:p>
           <a:p>
             <a:pPr lvl="1">
               <a:spcAft>
-                <a:spcPts val="200"/>
+                <a:spcPts val="300"/>
               </a:spcAft>
             </a:pPr>
             <a:r>
-              <a:rPr sz="1000">
+              <a:rPr sz="950">
                 <a:solidFill>
                   <a:srgbClr val="334155"/>
                 </a:solidFill>
                 <a:latin typeface="Arial"/>
               </a:rPr>
-              <a:t>• Operational Speed: 85%+ reduction in technical assessment and Detailed Project Report (DPR) synthesis time.</a:t>
+              <a:t>• 85% Time Savings: Accelerates technical assessment and Detailed Project Report (DPR) evaluation.</a:t>
             </a:r>
           </a:p>
           <a:p>
             <a:pPr lvl="1">
               <a:spcAft>
-                <a:spcPts val="200"/>
+                <a:spcPts val="300"/>
               </a:spcAft>
             </a:pPr>
             <a:r>
-              <a:rPr sz="1000">
+              <a:rPr sz="950">
                 <a:solidFill>
                   <a:srgbClr val="334155"/>
                 </a:solidFill>
                 <a:latin typeface="Arial"/>
               </a:rPr>
-              <a:t>• Economic Value: Optimized stripping ratio tracking and FMC rail corridor dispatch, mitigating costly operational bottlenecks.</a:t>
+              <a:t>• Auditable Provenance: Spatial bounding boxes eliminate regulatory disputes and non-compliance risk.</a:t>
             </a:r>
           </a:p>
           <a:p>
             <a:pPr lvl="1">
               <a:spcAft>
-                <a:spcPts val="200"/>
+                <a:spcPts val="300"/>
               </a:spcAft>
             </a:pPr>
             <a:r>
-              <a:rPr sz="1000">
+              <a:rPr sz="950">
                 <a:solidFill>
                   <a:srgbClr val="334155"/>
                 </a:solidFill>
                 <a:latin typeface="Arial"/>
               </a:rPr>
-              <a:t>• Zero Hallucination Guarantee: 100% auditable spatial citations eliminate flawed projections and regulatory compliance penalties.</a:t>
+              <a:t>• Pan-CIL Scalability: Turnkey deployment across all 8 Coal India operational subsidiaries.</a:t>
             </a:r>
           </a:p>
           <a:p>
             <a:pPr lvl="1">
               <a:spcAft>
-                <a:spcPts val="200"/>
+                <a:spcPts val="300"/>
               </a:spcAft>
             </a:pPr>
             <a:r>
-              <a:rPr sz="1000">
+              <a:rPr sz="950">
                 <a:solidFill>
                   <a:srgbClr val="334155"/>
                 </a:solidFill>
                 <a:latin typeface="Arial"/>
               </a:rPr>
-              <a:t>• Environmental Compliance: Rapid tracking of progressive mine closure plans, land reclamation, and afforestation targets per DGMS norms.</a:t>
+              <a:t>• Zero Cloud Licensing: Fully self-contained stack with zero per-query commercial subscriptions.</a:t>
             </a:r>
           </a:p>
         </p:txBody>
@@ -8544,7 +8490,7 @@
               </a:defRPr>
             </a:pPr>
             <a:r>
-              <a:t>Data Miners</a:t>
+              <a:t>data_miners</a:t>
             </a:r>
             <a:endParaRPr lang="en-IN" dirty="0"/>
           </a:p>
@@ -8617,7 +8563,7 @@
                 </a:solidFill>
                 <a:latin typeface="Arial"/>
               </a:rPr>
-              <a:t>Details / Links of Reference &amp; Research Work:</a:t>
+              <a:t>Project Repository &amp; Reference Documentation:</a:t>
             </a:r>
           </a:p>
           <a:p>
@@ -8627,13 +8573,13 @@
               </a:spcAft>
             </a:pPr>
             <a:r>
-              <a:rPr sz="1050">
-                <a:solidFill>
-                  <a:srgbClr val="334155"/>
+              <a:rPr sz="1000" b="1">
+                <a:solidFill>
+                  <a:srgbClr val="0E7490"/>
                 </a:solidFill>
                 <a:latin typeface="Arial"/>
               </a:rPr>
-              <a:t>• Ministry of Coal, Government of India: 'Guidelines for Preparation of Mine Plans and Mine Closure Plans for Coal and Lignite Mines' (2025/2026 Directives).</a:t>
+              <a:t>• GitHub Repository: https://github.com/Sankar7567/data_miners (Full source code, API, and setup guide).</a:t>
             </a:r>
           </a:p>
           <a:p>
@@ -8643,13 +8589,13 @@
               </a:spcAft>
             </a:pPr>
             <a:r>
-              <a:rPr sz="1050">
+              <a:rPr sz="1000">
                 <a:solidFill>
                   <a:srgbClr val="334155"/>
                 </a:solidFill>
                 <a:latin typeface="Arial"/>
               </a:rPr>
-              <a:t>• Central Mine Planning &amp; Design Institute (CMPDI): 'Annual Geological Exploration &amp; Drilling Reports (RI-I to RI-VII)', Gondwana Basin Stratigraphy Archives, Ranchi.</a:t>
+              <a:t>• Ministry of Coal, GoI: Guidelines for Preparation of Mine Plans &amp; Mine Closure Plans — coal.gov.in</a:t>
             </a:r>
           </a:p>
           <a:p>
@@ -8659,13 +8605,13 @@
               </a:spcAft>
             </a:pPr>
             <a:r>
-              <a:rPr sz="1050">
+              <a:rPr sz="1000">
                 <a:solidFill>
                   <a:srgbClr val="334155"/>
                 </a:solidFill>
                 <a:latin typeface="Arial"/>
               </a:rPr>
-              <a:t>• Coal India Limited (CIL): 'Operational &amp; Production Performance Review (FY 2023-24)', Subsidiary Reports (MCL, SECL, NCL, CCL, WCL, BCCL, ECL).</a:t>
+              <a:t>• Central Mine Planning &amp; Design Institute (CMPDI): Annual Geological Exploration &amp; Drilling Reports — cmpdi.co.in</a:t>
             </a:r>
           </a:p>
           <a:p>
@@ -8675,13 +8621,13 @@
               </a:spcAft>
             </a:pPr>
             <a:r>
-              <a:rPr sz="1050">
+              <a:rPr sz="1000">
                 <a:solidFill>
                   <a:srgbClr val="334155"/>
                 </a:solidFill>
                 <a:latin typeface="Arial"/>
               </a:rPr>
-              <a:t>• Directorate General of Mines Safety (DGMS): Statutory Operational Guidelines &amp; Safety Circulars for Opencast and Underground Coal Extraction.</a:t>
+              <a:t>• Coal India Limited (CIL): Operational Performance Reviews &amp; Business Responsibility Reports — coalindia.in</a:t>
             </a:r>
           </a:p>
           <a:p>
@@ -8691,13 +8637,13 @@
               </a:spcAft>
             </a:pPr>
             <a:r>
-              <a:rPr sz="1050">
+              <a:rPr sz="1000">
                 <a:solidFill>
                   <a:srgbClr val="334155"/>
                 </a:solidFill>
                 <a:latin typeface="Arial"/>
               </a:rPr>
-              <a:t>• Spatial Document Parsing &amp; Retrieval: PyMuPDF (Fitz) Token-Level Coordinate Mapping &amp; ChromaDB High-Density Vector Embedding Architecture.</a:t>
+              <a:t>• Directorate General of Mines Safety (DGMS): Statutory Operational Guidelines &amp; Safety Circulars.</a:t>
             </a:r>
           </a:p>
           <a:p>
@@ -8707,13 +8653,13 @@
               </a:spcAft>
             </a:pPr>
             <a:r>
-              <a:rPr sz="1050">
+              <a:rPr sz="1000">
                 <a:solidFill>
                   <a:srgbClr val="334155"/>
                 </a:solidFill>
                 <a:latin typeface="Arial"/>
               </a:rPr>
-              <a:t>• Hardware-Accelerated Inference: Groq LPU Deterministic Hardware Architecture for Ultra-Low Latency Large Language Model Serving.</a:t>
+              <a:t>• PyMuPDF &amp; ChromaDB: Open-source spatial coordinate extraction and high-density vector retrieval.</a:t>
             </a:r>
           </a:p>
         </p:txBody>

--- a/SIH2026_GeoIntel_Core_Data_Miners.pptx
+++ b/SIH2026_GeoIntel_Core_Data_Miners.pptx
@@ -5541,7 +5541,7 @@
         <p:spPr>
           <a:xfrm>
             <a:off x="457200" y="594360"/>
-            <a:ext cx="5120640" cy="1280160"/>
+            <a:ext cx="4114800" cy="1280160"/>
           </a:xfrm>
         </p:spPr>
         <p:txBody>
@@ -6148,7 +6148,7 @@
                 </a:solidFill>
                 <a:latin typeface="Arial"/>
               </a:rPr>
-              <a:t>Proposed Solution &amp; Prototype:</a:t>
+              <a:t>Proposed Solution:</a:t>
             </a:r>
           </a:p>
           <a:p>
@@ -6164,7 +6164,7 @@
                 </a:solidFill>
                 <a:latin typeface="Arial"/>
               </a:rPr>
-              <a:t>• Autonomous multimodal system for CMPDI borehole logs, Detailed Project Reports (DPRs), and CIL production data.</a:t>
+              <a:t>• Autonomous system for CMPDI logs &amp; CIL data.</a:t>
             </a:r>
           </a:p>
           <a:p>
@@ -6180,7 +6180,7 @@
                 </a:solidFill>
                 <a:latin typeface="Arial"/>
               </a:rPr>
-              <a:t>• Functional split-screen prototype with real-time PyMuPDF spatial coordinate auditing.</a:t>
+              <a:t>• Split-screen prototype with real-time auditing.</a:t>
             </a:r>
           </a:p>
           <a:p>
@@ -6199,7 +6199,7 @@
                 </a:solidFill>
                 <a:latin typeface="Arial"/>
               </a:rPr>
-              <a:t>Core Engineering Capabilities:</a:t>
+              <a:t>Core Capabilities:</a:t>
             </a:r>
           </a:p>
           <a:p>
@@ -6215,7 +6215,7 @@
                 </a:solidFill>
                 <a:latin typeface="Arial"/>
               </a:rPr>
-              <a:t>• Spatial Vector Grounding: Extracts [x0, y0, x1, y1] coordinates per token for 100% auditable citations.</a:t>
+              <a:t>• Spatial Vector Grounding: Extract precise coordinates for citations.</a:t>
             </a:r>
           </a:p>
           <a:p>
@@ -6231,7 +6231,7 @@
                 </a:solidFill>
                 <a:latin typeface="Arial"/>
               </a:rPr>
-              <a:t>• Dynamic View Synchronization: Citation bounding boxes update live on page navigation.</a:t>
+              <a:t>• Dynamic View: Bounding boxes update live.</a:t>
             </a:r>
           </a:p>
           <a:p>
@@ -6247,7 +6247,7 @@
                 </a:solidFill>
                 <a:latin typeface="Arial"/>
               </a:rPr>
-              <a:t>• Autonomous Report Studio: Synthesizes executive briefs &amp; DOCX files following custom engineering directives.</a:t>
+              <a:t>• Report Studio: Generate executive DOCX briefs autonomously.</a:t>
             </a:r>
           </a:p>
           <a:p>
@@ -6263,7 +6263,7 @@
                 </a:solidFill>
                 <a:latin typeface="Arial"/>
               </a:rPr>
-              <a:t>• Pan-CIL Production Analytics: Benchmarks coal extraction, stripping ratios, and OBR across 8 subsidiaries.</a:t>
+              <a:t>• Pan-CIL Analytics: Benchmark stripping ratios &amp; OBR across subsidiaries.</a:t>
             </a:r>
           </a:p>
           <a:p>
@@ -6282,7 +6282,7 @@
                 </a:solidFill>
                 <a:latin typeface="Arial"/>
               </a:rPr>
-              <a:t>Problem Addressed &amp; Innovation:</a:t>
+              <a:t>Innovation:</a:t>
             </a:r>
           </a:p>
           <a:p>
@@ -6298,7 +6298,7 @@
                 </a:solidFill>
                 <a:latin typeface="Arial"/>
               </a:rPr>
-              <a:t>• Replaces manual multi-week PDF cross-referencing with sub-second verified semantic retrieval.</a:t>
+              <a:t>• Sub-second semantic retrieval replaces manual verification.</a:t>
             </a:r>
           </a:p>
           <a:p>
@@ -6314,7 +6314,7 @@
                 </a:solidFill>
                 <a:latin typeface="Arial"/>
               </a:rPr>
-              <a:t>• Zero Hallucination Guarantee: Every assertion is bound to verifiable text in official government documents.</a:t>
+              <a:t>• Zero Hallucinations: Assertions bound to official text.</a:t>
             </a:r>
           </a:p>
         </p:txBody>
@@ -6690,7 +6690,7 @@
                 </a:solidFill>
                 <a:latin typeface="Arial"/>
               </a:rPr>
-              <a:t>Technologies to be Used:</a:t>
+              <a:t>Tech Stack:</a:t>
             </a:r>
           </a:p>
           <a:p>
@@ -6706,7 +6706,7 @@
                 </a:solidFill>
                 <a:latin typeface="Arial"/>
               </a:rPr>
-              <a:t>• Frontend: React 18, Vite, Tailwind CSS, Lucide Icons, dynamic SVG coordinate overlays.</a:t>
+              <a:t>• Frontend: React 18, Vite, Tailwind CSS.</a:t>
             </a:r>
           </a:p>
           <a:p>
@@ -6722,7 +6722,7 @@
                 </a:solidFill>
                 <a:latin typeface="Arial"/>
               </a:rPr>
-              <a:t>• Backend API: FastAPI, Python 3.12, Uvicorn, asynchronous multipart streaming endpoints.</a:t>
+              <a:t>• Backend: FastAPI, Python 3.12, Uvicorn.</a:t>
             </a:r>
           </a:p>
           <a:p>
@@ -6738,7 +6738,7 @@
                 </a:solidFill>
                 <a:latin typeface="Arial"/>
               </a:rPr>
-              <a:t>• Spatial Extraction: PyMuPDF (Fitz) token parser preserving geometry &amp; table bounding boxes.</a:t>
+              <a:t>• Parsing: PyMuPDF (Fitz) for spatial extraction.</a:t>
             </a:r>
           </a:p>
           <a:p>
@@ -6754,7 +6754,7 @@
                 </a:solidFill>
                 <a:latin typeface="Arial"/>
               </a:rPr>
-              <a:t>• Vector Database: ChromaDB persistent vector store with 384-dim dense embeddings.</a:t>
+              <a:t>• Vector DB: ChromaDB for embeddings.</a:t>
             </a:r>
           </a:p>
           <a:p>
@@ -6770,7 +6770,7 @@
                 </a:solidFill>
                 <a:latin typeface="Arial"/>
               </a:rPr>
-              <a:t>• Inference Hardware: Groq LPU Hardware Acceleration (LLaMA 3.3 70B &amp; Qwen 2.5 32B).</a:t>
+              <a:t>• AI Hardware: Groq LPU (LLaMA 3.3 &amp; Qwen 2.5).</a:t>
             </a:r>
           </a:p>
           <a:p>
@@ -6786,7 +6786,7 @@
                 </a:solidFill>
                 <a:latin typeface="Arial"/>
               </a:rPr>
-              <a:t>• Multi-Format Synthesis: ReportLab PDF engine, python-docx compiler, Markdown exporter.</a:t>
+              <a:t>• Output: ReportLab, python-docx.</a:t>
             </a:r>
           </a:p>
           <a:p>
@@ -6805,7 +6805,7 @@
                 </a:solidFill>
                 <a:latin typeface="Arial"/>
               </a:rPr>
-              <a:t>Methodology &amp; Implementation Pipeline:</a:t>
+              <a:t>Methodology:</a:t>
             </a:r>
           </a:p>
           <a:p>
@@ -6821,7 +6821,7 @@
                 </a:solidFill>
                 <a:latin typeface="Arial"/>
               </a:rPr>
-              <a:t>• 1. Harvester: Ministry of Coal web scraper &amp; instant drag-and-drop document ingestion.</a:t>
+              <a:t>• 1. Harvester: Automated web scraper &amp; PDF ingestion.</a:t>
             </a:r>
           </a:p>
           <a:p>
@@ -6837,7 +6837,7 @@
                 </a:solidFill>
                 <a:latin typeface="Arial"/>
               </a:rPr>
-              <a:t>• 2. Spatial Indexing: Sliding-window chunking retaining exact pixel bounding coordinates.</a:t>
+              <a:t>• 2. Indexing: Sliding-window chunking with spatial data.</a:t>
             </a:r>
           </a:p>
           <a:p>
@@ -6853,7 +6853,7 @@
                 </a:solidFill>
                 <a:latin typeface="Arial"/>
               </a:rPr>
-              <a:t>• 3. Grounded Retrieval: Hybrid search combining dense vectors with inverted keyword indices.</a:t>
+              <a:t>• 3. Retrieval: Hybrid search (dense vectors + keywords).</a:t>
             </a:r>
           </a:p>
           <a:p>
@@ -6869,7 +6869,7 @@
                 </a:solidFill>
                 <a:latin typeface="Arial"/>
               </a:rPr>
-              <a:t>• 4. Resilient Synthesis: Dynamic token budgeting with local extractive fallback.</a:t>
+              <a:t>• 4. Synthesis: Dynamic generation with local fallback.</a:t>
             </a:r>
           </a:p>
         </p:txBody>
@@ -7343,7 +7343,7 @@
                 </a:solidFill>
                 <a:latin typeface="Arial"/>
               </a:rPr>
-              <a:t>Feasibility &amp; Operational Viability:</a:t>
+              <a:t>Feasibility &amp; Viability:</a:t>
             </a:r>
           </a:p>
           <a:p>
@@ -7359,7 +7359,7 @@
                 </a:solidFill>
                 <a:latin typeface="Arial"/>
               </a:rPr>
-              <a:t>• Validated on 100+ multi-page geological documents, CIL annual reviews, and detailed mine plans.</a:t>
+              <a:t>• Validated on 100+ official geological documents.</a:t>
             </a:r>
           </a:p>
           <a:p>
@@ -7375,7 +7375,7 @@
                 </a:solidFill>
                 <a:latin typeface="Arial"/>
               </a:rPr>
-              <a:t>• Sub-second vector indexing: Parses 50-page complex DPRs in under 3.2 seconds.</a:t>
+              <a:t>• Lightning Fast: Parses 50-page DPRs in &lt; 3.2s.</a:t>
             </a:r>
           </a:p>
           <a:p>
@@ -7391,7 +7391,7 @@
                 </a:solidFill>
                 <a:latin typeface="Arial"/>
               </a:rPr>
-              <a:t>• Enterprise Deployment: Containerized microservices ready for secure on-premises CIL servers.</a:t>
+              <a:t>• Enterprise Ready: Containerized microservices.</a:t>
             </a:r>
           </a:p>
           <a:p>
@@ -7407,7 +7407,7 @@
                 </a:solidFill>
                 <a:latin typeface="Arial"/>
               </a:rPr>
-              <a:t>• 100% Data Sovereignty: Zero external data exposure of confidential exploration reserves.</a:t>
+              <a:t>• Data Sovereignty: 100% secure, zero external exposure.</a:t>
             </a:r>
           </a:p>
           <a:p>
@@ -7426,7 +7426,7 @@
                 </a:solidFill>
                 <a:latin typeface="Arial"/>
               </a:rPr>
-              <a:t>Operational Challenges &amp; Mitigations:</a:t>
+              <a:t>Challenges &amp; Mitigations:</a:t>
             </a:r>
           </a:p>
           <a:p>
@@ -7442,7 +7442,7 @@
                 </a:solidFill>
                 <a:latin typeface="Arial"/>
               </a:rPr>
-              <a:t>• API Rate Limiting: Resilient token budgeting (2200 max tokens) with exponential backoff retry.</a:t>
+              <a:t>• Rate Limits: Resilient token budgeting &amp; retries.</a:t>
             </a:r>
           </a:p>
           <a:p>
@@ -7458,7 +7458,7 @@
                 </a:solidFill>
                 <a:latin typeface="Arial"/>
               </a:rPr>
-              <a:t>• Network Outage Tolerance: Local extractive fallback ensures zero system downtime.</a:t>
+              <a:t>• Network Outages: Local extractive fallback.</a:t>
             </a:r>
           </a:p>
           <a:p>
@@ -7474,7 +7474,7 @@
                 </a:solidFill>
                 <a:latin typeface="Arial"/>
               </a:rPr>
-              <a:t>• Heterogeneous Archives: PyMuPDF token normalization adapts to any PDF format or scan geometry.</a:t>
+              <a:t>• Complex Formats: PyMuPDF adapts to any scan geometry.</a:t>
             </a:r>
           </a:p>
         </p:txBody>
@@ -7953,7 +7953,7 @@
                 </a:solidFill>
                 <a:latin typeface="Arial"/>
               </a:rPr>
-              <a:t>Direct Impact on Target Stakeholders:</a:t>
+              <a:t>Stakeholder Impact:</a:t>
             </a:r>
           </a:p>
           <a:p>
@@ -7969,7 +7969,7 @@
                 </a:solidFill>
                 <a:latin typeface="Arial"/>
               </a:rPr>
-              <a:t>• CMPDI Geologists: Instant lookup of Gondwana stratigraphy, Barakar formations, and regional meterage.</a:t>
+              <a:t>• Geologists: Instant lookup of stratigraphy &amp; formations.</a:t>
             </a:r>
           </a:p>
           <a:p>
@@ -7985,7 +7985,7 @@
                 </a:solidFill>
                 <a:latin typeface="Arial"/>
               </a:rPr>
-              <a:t>• Mine Planning Officers: Real-time tracking of Overburden Removal (OBR), stripping ratios, and productivity.</a:t>
+              <a:t>• Planning Officers: Real-time OBR &amp; productivity tracking.</a:t>
             </a:r>
           </a:p>
           <a:p>
@@ -8001,7 +8001,7 @@
                 </a:solidFill>
                 <a:latin typeface="Arial"/>
               </a:rPr>
-              <a:t>• Ministry of Coal Leadership: Board-level summaries compiled in minutes rather than weeks.</a:t>
+              <a:t>• Ministry Leadership: Summaries in minutes, not weeks.</a:t>
             </a:r>
           </a:p>
           <a:p>
@@ -8020,7 +8020,7 @@
                 </a:solidFill>
                 <a:latin typeface="Arial"/>
               </a:rPr>
-              <a:t>Quantifiable Strategic Benefits:</a:t>
+              <a:t>Strategic Benefits:</a:t>
             </a:r>
           </a:p>
           <a:p>
@@ -8036,7 +8036,7 @@
                 </a:solidFill>
                 <a:latin typeface="Arial"/>
               </a:rPr>
-              <a:t>• 85% Time Savings: Accelerates technical assessment and Detailed Project Report (DPR) evaluation.</a:t>
+              <a:t>• 85% Time Savings in DPR evaluation.</a:t>
             </a:r>
           </a:p>
           <a:p>
@@ -8052,7 +8052,7 @@
                 </a:solidFill>
                 <a:latin typeface="Arial"/>
               </a:rPr>
-              <a:t>• Auditable Provenance: Spatial bounding boxes eliminate regulatory disputes and non-compliance risk.</a:t>
+              <a:t>• Auditable Provenance eliminates regulatory disputes.</a:t>
             </a:r>
           </a:p>
           <a:p>
@@ -8068,7 +8068,7 @@
                 </a:solidFill>
                 <a:latin typeface="Arial"/>
               </a:rPr>
-              <a:t>• Pan-CIL Scalability: Turnkey deployment across all 8 Coal India operational subsidiaries.</a:t>
+              <a:t>• Scalable across all 8 Coal India subsidiaries.</a:t>
             </a:r>
           </a:p>
           <a:p>
@@ -8084,7 +8084,7 @@
                 </a:solidFill>
                 <a:latin typeface="Arial"/>
               </a:rPr>
-              <a:t>• Zero Cloud Licensing: Fully self-contained stack with zero per-query commercial subscriptions.</a:t>
+              <a:t>• Zero Cloud Licensing cost (self-contained stack).</a:t>
             </a:r>
           </a:p>
         </p:txBody>
@@ -8563,7 +8563,7 @@
                 </a:solidFill>
                 <a:latin typeface="Arial"/>
               </a:rPr>
-              <a:t>Project Repository &amp; Reference Documentation:</a:t>
+              <a:t>References &amp; Links:</a:t>
             </a:r>
           </a:p>
           <a:p>
@@ -8579,7 +8579,7 @@
                 </a:solidFill>
                 <a:latin typeface="Arial"/>
               </a:rPr>
-              <a:t>• GitHub Repository: https://github.com/Sankar7567/data_miners (Full source code, API, and setup guide).</a:t>
+              <a:t>• GitHub Repository: https://github.com/Sankar7567/data_miners</a:t>
             </a:r>
           </a:p>
           <a:p>
@@ -8595,7 +8595,7 @@
                 </a:solidFill>
                 <a:latin typeface="Arial"/>
               </a:rPr>
-              <a:t>• Ministry of Coal, GoI: Guidelines for Preparation of Mine Plans &amp; Mine Closure Plans — coal.gov.in</a:t>
+              <a:t>• Ministry of Coal: Guidelines for Mine Plans (coal.gov.in)</a:t>
             </a:r>
           </a:p>
           <a:p>
@@ -8611,7 +8611,7 @@
                 </a:solidFill>
                 <a:latin typeface="Arial"/>
               </a:rPr>
-              <a:t>• Central Mine Planning &amp; Design Institute (CMPDI): Annual Geological Exploration &amp; Drilling Reports — cmpdi.co.in</a:t>
+              <a:t>• CMPDI: Annual Exploration Reports (cmpdi.co.in)</a:t>
             </a:r>
           </a:p>
           <a:p>
@@ -8627,7 +8627,7 @@
                 </a:solidFill>
                 <a:latin typeface="Arial"/>
               </a:rPr>
-              <a:t>• Coal India Limited (CIL): Operational Performance Reviews &amp; Business Responsibility Reports — coalindia.in</a:t>
+              <a:t>• Coal India (CIL): Operational Reviews (coalindia.in)</a:t>
             </a:r>
           </a:p>
           <a:p>
@@ -8643,7 +8643,7 @@
                 </a:solidFill>
                 <a:latin typeface="Arial"/>
               </a:rPr>
-              <a:t>• Directorate General of Mines Safety (DGMS): Statutory Operational Guidelines &amp; Safety Circulars.</a:t>
+              <a:t>• DGMS: Statutory Safety Circulars.</a:t>
             </a:r>
           </a:p>
           <a:p>
@@ -8659,7 +8659,7 @@
                 </a:solidFill>
                 <a:latin typeface="Arial"/>
               </a:rPr>
-              <a:t>• PyMuPDF &amp; ChromaDB: Open-source spatial coordinate extraction and high-density vector retrieval.</a:t>
+              <a:t>• Libraries: PyMuPDF &amp; ChromaDB.</a:t>
             </a:r>
           </a:p>
         </p:txBody>

--- a/SIH2026_GeoIntel_Core_Data_Miners.pptx
+++ b/SIH2026_GeoIntel_Core_Data_Miners.pptx
@@ -5540,8 +5540,8 @@
         </p:nvSpPr>
         <p:spPr>
           <a:xfrm>
-            <a:off x="457200" y="594360"/>
-            <a:ext cx="5120640" cy="1280160"/>
+            <a:off x="457200" y="685800"/>
+            <a:ext cx="4572000" cy="1005840"/>
           </a:xfrm>
         </p:spPr>
         <p:txBody>
@@ -5549,7 +5549,7 @@
           <a:lstStyle/>
           <a:p>
             <a:pPr algn="l">
-              <a:defRPr sz="2400" b="1">
+              <a:defRPr sz="2000" b="1">
                 <a:solidFill>
                   <a:srgbClr val="1E3A8A"/>
                 </a:solidFill>
@@ -5570,9 +5570,9 @@
           <a:p>
             <a:pPr algn="l">
               <a:spcBef>
-                <a:spcPts val="400"/>
+                <a:spcPts val="300"/>
               </a:spcBef>
-              <a:defRPr sz="1300" b="1">
+              <a:defRPr sz="1100" b="1">
                 <a:solidFill>
                   <a:srgbClr val="0E7490"/>
                 </a:solidFill>
@@ -5580,7 +5580,7 @@
               </a:defRPr>
             </a:pPr>
             <a:r>
-              <a:t>Autonomous Geological Intelligence &amp; Spatial Reporting Portal</a:t>
+              <a:t>Autonomous Geological Intelligence Portal</a:t>
             </a:r>
           </a:p>
         </p:txBody>
@@ -5640,8 +5640,8 @@
         </p:nvSpPr>
         <p:spPr>
           <a:xfrm>
-            <a:off x="457200" y="2057400"/>
-            <a:ext cx="5120640" cy="4389120"/>
+            <a:off x="457200" y="1965960"/>
+            <a:ext cx="4754880" cy="4389120"/>
           </a:xfrm>
           <a:prstGeom prst="rect">
             <a:avLst/>
@@ -5656,11 +5656,11 @@
           <a:p>
             <a:pPr>
               <a:spcAft>
-                <a:spcPts val="800"/>
+                <a:spcPts val="700"/>
               </a:spcAft>
             </a:pPr>
             <a:r>
-              <a:rPr sz="1300" b="1">
+              <a:rPr sz="1200" b="1">
                 <a:solidFill>
                   <a:srgbClr val="1E3A8A"/>
                 </a:solidFill>
@@ -5669,7 +5669,7 @@
               <a:t>Problem Statement ID : </a:t>
             </a:r>
             <a:r>
-              <a:rPr sz="1300" b="1">
+              <a:rPr sz="1200" b="1">
                 <a:solidFill>
                   <a:srgbClr val="1E293B"/>
                 </a:solidFill>
@@ -5682,11 +5682,11 @@
           <a:p>
             <a:pPr>
               <a:spcAft>
-                <a:spcPts val="800"/>
+                <a:spcPts val="700"/>
               </a:spcAft>
             </a:pPr>
             <a:r>
-              <a:rPr sz="1300" b="1">
+              <a:rPr sz="1200" b="1">
                 <a:solidFill>
                   <a:srgbClr val="1E3A8A"/>
                 </a:solidFill>
@@ -5695,23 +5695,23 @@
               <a:t>Problem Statement Title : </a:t>
             </a:r>
             <a:r>
-              <a:rPr sz="1300" b="0">
+              <a:rPr sz="1200" b="0">
                 <a:solidFill>
                   <a:srgbClr val="1E293B"/>
                 </a:solidFill>
                 <a:latin typeface="Arial"/>
               </a:rPr>
-              <a:t>AI-Powered Geological &amp; Mining Reporting Solution</a:t>
+              <a:t>AI-Powered Geological &amp; Mining Reporting</a:t>
             </a:r>
           </a:p>
           <a:p>
             <a:pPr>
               <a:spcAft>
-                <a:spcPts val="800"/>
+                <a:spcPts val="700"/>
               </a:spcAft>
             </a:pPr>
             <a:r>
-              <a:rPr sz="1300" b="1">
+              <a:rPr sz="1200" b="1">
                 <a:solidFill>
                   <a:srgbClr val="1E3A8A"/>
                 </a:solidFill>
@@ -5720,7 +5720,7 @@
               <a:t>Theme : </a:t>
             </a:r>
             <a:r>
-              <a:rPr sz="1300" b="0">
+              <a:rPr sz="1200" b="0">
                 <a:solidFill>
                   <a:srgbClr val="1E293B"/>
                 </a:solidFill>
@@ -5732,11 +5732,11 @@
           <a:p>
             <a:pPr>
               <a:spcAft>
-                <a:spcPts val="800"/>
+                <a:spcPts val="700"/>
               </a:spcAft>
             </a:pPr>
             <a:r>
-              <a:rPr sz="1300" b="1">
+              <a:rPr sz="1200" b="1">
                 <a:solidFill>
                   <a:srgbClr val="1E3A8A"/>
                 </a:solidFill>
@@ -5745,7 +5745,7 @@
               <a:t>PS Category : </a:t>
             </a:r>
             <a:r>
-              <a:rPr sz="1300" b="0">
+              <a:rPr sz="1200" b="0">
                 <a:solidFill>
                   <a:srgbClr val="1E293B"/>
                 </a:solidFill>
@@ -5757,11 +5757,11 @@
           <a:p>
             <a:pPr>
               <a:spcAft>
-                <a:spcPts val="800"/>
+                <a:spcPts val="700"/>
               </a:spcAft>
             </a:pPr>
             <a:r>
-              <a:rPr sz="1300" b="1">
+              <a:rPr sz="1200" b="1">
                 <a:solidFill>
                   <a:srgbClr val="1E3A8A"/>
                 </a:solidFill>
@@ -5770,7 +5770,7 @@
               <a:t>Team ID : </a:t>
             </a:r>
             <a:r>
-              <a:rPr sz="1300" b="0">
+              <a:rPr sz="1200" b="0">
                 <a:solidFill>
                   <a:srgbClr val="1E293B"/>
                 </a:solidFill>
@@ -5782,11 +5782,11 @@
           <a:p>
             <a:pPr>
               <a:spcAft>
-                <a:spcPts val="800"/>
+                <a:spcPts val="700"/>
               </a:spcAft>
             </a:pPr>
             <a:r>
-              <a:rPr sz="1300" b="1">
+              <a:rPr sz="1200" b="1">
                 <a:solidFill>
                   <a:srgbClr val="1E3A8A"/>
                 </a:solidFill>
@@ -5795,7 +5795,7 @@
               <a:t>Team Name : </a:t>
             </a:r>
             <a:r>
-              <a:rPr sz="1300" b="1">
+              <a:rPr sz="1200" b="1">
                 <a:solidFill>
                   <a:srgbClr val="C2410C"/>
                 </a:solidFill>
@@ -6148,7 +6148,7 @@
                 </a:solidFill>
                 <a:latin typeface="Arial"/>
               </a:rPr>
-              <a:t>Proposed Solution &amp; Prototype:</a:t>
+              <a:t>Proposed Solution:</a:t>
             </a:r>
           </a:p>
           <a:p>
@@ -6158,13 +6158,13 @@
               </a:spcAft>
             </a:pPr>
             <a:r>
-              <a:rPr sz="950">
+              <a:rPr sz="1000">
                 <a:solidFill>
                   <a:srgbClr val="334155"/>
                 </a:solidFill>
                 <a:latin typeface="Arial"/>
               </a:rPr>
-              <a:t>• Autonomous multimodal system for CMPDI borehole logs, Detailed Project Reports (DPRs), and CIL production data.</a:t>
+              <a:t>• Autonomous system for CMPDI borehole logs &amp; CIL production data</a:t>
             </a:r>
           </a:p>
           <a:p>
@@ -6174,13 +6174,13 @@
               </a:spcAft>
             </a:pPr>
             <a:r>
-              <a:rPr sz="950">
+              <a:rPr sz="1000">
                 <a:solidFill>
                   <a:srgbClr val="334155"/>
                 </a:solidFill>
                 <a:latin typeface="Arial"/>
               </a:rPr>
-              <a:t>• Functional split-screen prototype with real-time PyMuPDF spatial coordinate auditing.</a:t>
+              <a:t>• Functional split-screen prototype with real-time spatial auditing</a:t>
             </a:r>
           </a:p>
           <a:p>
@@ -6199,7 +6199,7 @@
                 </a:solidFill>
                 <a:latin typeface="Arial"/>
               </a:rPr>
-              <a:t>Core Engineering Capabilities:</a:t>
+              <a:t>Core Capabilities:</a:t>
             </a:r>
           </a:p>
           <a:p>
@@ -6209,13 +6209,13 @@
               </a:spcAft>
             </a:pPr>
             <a:r>
-              <a:rPr sz="950">
+              <a:rPr sz="1000">
                 <a:solidFill>
                   <a:srgbClr val="334155"/>
                 </a:solidFill>
                 <a:latin typeface="Arial"/>
               </a:rPr>
-              <a:t>• Spatial Vector Grounding: Extracts [x0, y0, x1, y1] coordinates per token for 100% auditable citations.</a:t>
+              <a:t>• Spatial Vector Grounding with [x0, y0, x1, y1] coordinates</a:t>
             </a:r>
           </a:p>
           <a:p>
@@ -6225,13 +6225,13 @@
               </a:spcAft>
             </a:pPr>
             <a:r>
-              <a:rPr sz="950">
+              <a:rPr sz="1000">
                 <a:solidFill>
                   <a:srgbClr val="334155"/>
                 </a:solidFill>
                 <a:latin typeface="Arial"/>
               </a:rPr>
-              <a:t>• Dynamic View Synchronization: Citation bounding boxes update live on page navigation.</a:t>
+              <a:t>• Dynamic citation bounding boxes synced with page navigation</a:t>
             </a:r>
           </a:p>
           <a:p>
@@ -6241,13 +6241,13 @@
               </a:spcAft>
             </a:pPr>
             <a:r>
-              <a:rPr sz="950">
+              <a:rPr sz="1000">
                 <a:solidFill>
                   <a:srgbClr val="334155"/>
                 </a:solidFill>
                 <a:latin typeface="Arial"/>
               </a:rPr>
-              <a:t>• Autonomous Report Studio: Synthesizes executive briefs &amp; DOCX files following custom engineering directives.</a:t>
+              <a:t>• Autonomous Report Studio for executive briefs &amp; DOCX synthesis</a:t>
             </a:r>
           </a:p>
           <a:p>
@@ -6257,13 +6257,13 @@
               </a:spcAft>
             </a:pPr>
             <a:r>
-              <a:rPr sz="950">
+              <a:rPr sz="1000">
                 <a:solidFill>
                   <a:srgbClr val="334155"/>
                 </a:solidFill>
                 <a:latin typeface="Arial"/>
               </a:rPr>
-              <a:t>• Pan-CIL Production Analytics: Benchmarks coal extraction, stripping ratios, and OBR across 8 subsidiaries.</a:t>
+              <a:t>• Pan-CIL Production Analytics across 8 subsidiaries</a:t>
             </a:r>
           </a:p>
           <a:p>
@@ -6282,7 +6282,7 @@
                 </a:solidFill>
                 <a:latin typeface="Arial"/>
               </a:rPr>
-              <a:t>Problem Addressed &amp; Innovation:</a:t>
+              <a:t>Innovation:</a:t>
             </a:r>
           </a:p>
           <a:p>
@@ -6292,13 +6292,13 @@
               </a:spcAft>
             </a:pPr>
             <a:r>
-              <a:rPr sz="950">
+              <a:rPr sz="1000">
                 <a:solidFill>
                   <a:srgbClr val="334155"/>
                 </a:solidFill>
                 <a:latin typeface="Arial"/>
               </a:rPr>
-              <a:t>• Replaces manual multi-week PDF cross-referencing with sub-second verified semantic retrieval.</a:t>
+              <a:t>• Replaces weeks of manual PDF cross-referencing with sub-second retrieval</a:t>
             </a:r>
           </a:p>
           <a:p>
@@ -6308,13 +6308,13 @@
               </a:spcAft>
             </a:pPr>
             <a:r>
-              <a:rPr sz="950">
+              <a:rPr sz="1000">
                 <a:solidFill>
                   <a:srgbClr val="334155"/>
                 </a:solidFill>
                 <a:latin typeface="Arial"/>
               </a:rPr>
-              <a:t>• Zero Hallucination Guarantee: Every assertion is bound to verifiable text in official government documents.</a:t>
+              <a:t>• Zero hallucination: every assertion bound to official documents</a:t>
             </a:r>
           </a:p>
         </p:txBody>
@@ -6374,7 +6374,7 @@
               </a:defRPr>
             </a:pPr>
             <a:r>
-              <a:t>Figure 1: GeoIntel Core Live Split-Screen RAG Assistant with Dynamic Spatial Bounding-Box Audit</a:t>
+              <a:t>Figure 1: GeoIntel Core Live Split-Screen RAG with Dynamic Spatial Bounding-Box Audit</a:t>
             </a:r>
           </a:p>
         </p:txBody>
@@ -6690,7 +6690,7 @@
                 </a:solidFill>
                 <a:latin typeface="Arial"/>
               </a:rPr>
-              <a:t>Technologies to be Used:</a:t>
+              <a:t>Technologies:</a:t>
             </a:r>
           </a:p>
           <a:p>
@@ -6700,13 +6700,13 @@
               </a:spcAft>
             </a:pPr>
             <a:r>
-              <a:rPr sz="950">
+              <a:rPr sz="1000">
                 <a:solidFill>
                   <a:srgbClr val="334155"/>
                 </a:solidFill>
                 <a:latin typeface="Arial"/>
               </a:rPr>
-              <a:t>• Frontend: React 18, Vite, Tailwind CSS, Lucide Icons, dynamic SVG coordinate overlays.</a:t>
+              <a:t>• Frontend: React 18, Vite, Tailwind CSS</a:t>
             </a:r>
           </a:p>
           <a:p>
@@ -6716,13 +6716,13 @@
               </a:spcAft>
             </a:pPr>
             <a:r>
-              <a:rPr sz="950">
+              <a:rPr sz="1000">
                 <a:solidFill>
                   <a:srgbClr val="334155"/>
                 </a:solidFill>
                 <a:latin typeface="Arial"/>
               </a:rPr>
-              <a:t>• Backend API: FastAPI, Python 3.12, Uvicorn, asynchronous multipart streaming endpoints.</a:t>
+              <a:t>• Backend: FastAPI, Python 3.12, Uvicorn</a:t>
             </a:r>
           </a:p>
           <a:p>
@@ -6732,13 +6732,13 @@
               </a:spcAft>
             </a:pPr>
             <a:r>
-              <a:rPr sz="950">
+              <a:rPr sz="1000">
                 <a:solidFill>
                   <a:srgbClr val="334155"/>
                 </a:solidFill>
                 <a:latin typeface="Arial"/>
               </a:rPr>
-              <a:t>• Spatial Extraction: PyMuPDF (Fitz) token parser preserving geometry &amp; table bounding boxes.</a:t>
+              <a:t>• Spatial Extraction: PyMuPDF (Fitz) token parser</a:t>
             </a:r>
           </a:p>
           <a:p>
@@ -6748,13 +6748,13 @@
               </a:spcAft>
             </a:pPr>
             <a:r>
-              <a:rPr sz="950">
+              <a:rPr sz="1000">
                 <a:solidFill>
                   <a:srgbClr val="334155"/>
                 </a:solidFill>
                 <a:latin typeface="Arial"/>
               </a:rPr>
-              <a:t>• Vector Database: ChromaDB persistent vector store with 384-dim dense embeddings.</a:t>
+              <a:t>• Vector Store: ChromaDB with 384-dim embeddings</a:t>
             </a:r>
           </a:p>
           <a:p>
@@ -6764,13 +6764,13 @@
               </a:spcAft>
             </a:pPr>
             <a:r>
-              <a:rPr sz="950">
+              <a:rPr sz="1000">
                 <a:solidFill>
                   <a:srgbClr val="334155"/>
                 </a:solidFill>
                 <a:latin typeface="Arial"/>
               </a:rPr>
-              <a:t>• Inference Hardware: Groq LPU Hardware Acceleration (LLaMA 3.3 70B &amp; Qwen 2.5 32B).</a:t>
+              <a:t>• Inference: Groq LPU (LLaMA 3.3 70B, Qwen 2.5 32B)</a:t>
             </a:r>
           </a:p>
           <a:p>
@@ -6780,13 +6780,13 @@
               </a:spcAft>
             </a:pPr>
             <a:r>
-              <a:rPr sz="950">
+              <a:rPr sz="1000">
                 <a:solidFill>
                   <a:srgbClr val="334155"/>
                 </a:solidFill>
                 <a:latin typeface="Arial"/>
               </a:rPr>
-              <a:t>• Multi-Format Synthesis: ReportLab PDF engine, python-docx compiler, Markdown exporter.</a:t>
+              <a:t>• Export: ReportLab PDF, python-docx, Markdown</a:t>
             </a:r>
           </a:p>
           <a:p>
@@ -6805,7 +6805,7 @@
                 </a:solidFill>
                 <a:latin typeface="Arial"/>
               </a:rPr>
-              <a:t>Methodology &amp; Implementation Pipeline:</a:t>
+              <a:t>Implementation Pipeline:</a:t>
             </a:r>
           </a:p>
           <a:p>
@@ -6815,13 +6815,13 @@
               </a:spcAft>
             </a:pPr>
             <a:r>
-              <a:rPr sz="950">
+              <a:rPr sz="1000">
                 <a:solidFill>
                   <a:srgbClr val="334155"/>
                 </a:solidFill>
                 <a:latin typeface="Arial"/>
               </a:rPr>
-              <a:t>• 1. Harvester: Ministry of Coal web scraper &amp; instant drag-and-drop document ingestion.</a:t>
+              <a:t>• 1. Harvester: Ministry of Coal web scraper &amp; drag-and-drop ingestion</a:t>
             </a:r>
           </a:p>
           <a:p>
@@ -6831,13 +6831,13 @@
               </a:spcAft>
             </a:pPr>
             <a:r>
-              <a:rPr sz="950">
+              <a:rPr sz="1000">
                 <a:solidFill>
                   <a:srgbClr val="334155"/>
                 </a:solidFill>
                 <a:latin typeface="Arial"/>
               </a:rPr>
-              <a:t>• 2. Spatial Indexing: Sliding-window chunking retaining exact pixel bounding coordinates.</a:t>
+              <a:t>• 2. Spatial Indexing: Sliding-window chunking with pixel coordinates</a:t>
             </a:r>
           </a:p>
           <a:p>
@@ -6847,13 +6847,13 @@
               </a:spcAft>
             </a:pPr>
             <a:r>
-              <a:rPr sz="950">
+              <a:rPr sz="1000">
                 <a:solidFill>
                   <a:srgbClr val="334155"/>
                 </a:solidFill>
                 <a:latin typeface="Arial"/>
               </a:rPr>
-              <a:t>• 3. Grounded Retrieval: Hybrid search combining dense vectors with inverted keyword indices.</a:t>
+              <a:t>• 3. Grounded Retrieval: Hybrid dense vectors + keyword indices</a:t>
             </a:r>
           </a:p>
           <a:p>
@@ -6863,13 +6863,13 @@
               </a:spcAft>
             </a:pPr>
             <a:r>
-              <a:rPr sz="950">
+              <a:rPr sz="1000">
                 <a:solidFill>
                   <a:srgbClr val="334155"/>
                 </a:solidFill>
                 <a:latin typeface="Arial"/>
               </a:rPr>
-              <a:t>• 4. Resilient Synthesis: Dynamic token budgeting with local extractive fallback.</a:t>
+              <a:t>• 4. Synthesis: Dynamic token budgeting with extractive fallback</a:t>
             </a:r>
           </a:p>
         </p:txBody>
@@ -6929,7 +6929,7 @@
               </a:defRPr>
             </a:pPr>
             <a:r>
-              <a:t>Figure 2: GeoIntel Core End-to-End 4-Stage Multimodal Architecture (Team data_miners)</a:t>
+              <a:t>Figure 2: GeoIntel Core 4-Stage Architecture (Team data_miners)</a:t>
             </a:r>
           </a:p>
         </p:txBody>
@@ -7343,7 +7343,7 @@
                 </a:solidFill>
                 <a:latin typeface="Arial"/>
               </a:rPr>
-              <a:t>Feasibility &amp; Operational Viability:</a:t>
+              <a:t>Feasibility &amp; Viability:</a:t>
             </a:r>
           </a:p>
           <a:p>
@@ -7353,13 +7353,13 @@
               </a:spcAft>
             </a:pPr>
             <a:r>
-              <a:rPr sz="950">
+              <a:rPr sz="1000">
                 <a:solidFill>
                   <a:srgbClr val="334155"/>
                 </a:solidFill>
                 <a:latin typeface="Arial"/>
               </a:rPr>
-              <a:t>• Validated on 100+ multi-page geological documents, CIL annual reviews, and detailed mine plans.</a:t>
+              <a:t>• Validated on 100+ geological documents, CIL reviews, mine plans</a:t>
             </a:r>
           </a:p>
           <a:p>
@@ -7369,13 +7369,13 @@
               </a:spcAft>
             </a:pPr>
             <a:r>
-              <a:rPr sz="950">
+              <a:rPr sz="1000">
                 <a:solidFill>
                   <a:srgbClr val="334155"/>
                 </a:solidFill>
                 <a:latin typeface="Arial"/>
               </a:rPr>
-              <a:t>• Sub-second vector indexing: Parses 50-page complex DPRs in under 3.2 seconds.</a:t>
+              <a:t>• Sub-second indexing: 50-page DPRs parsed in under 3.2 seconds</a:t>
             </a:r>
           </a:p>
           <a:p>
@@ -7385,13 +7385,13 @@
               </a:spcAft>
             </a:pPr>
             <a:r>
-              <a:rPr sz="950">
+              <a:rPr sz="1000">
                 <a:solidFill>
                   <a:srgbClr val="334155"/>
                 </a:solidFill>
                 <a:latin typeface="Arial"/>
               </a:rPr>
-              <a:t>• Enterprise Deployment: Containerized microservices ready for secure on-premises CIL servers.</a:t>
+              <a:t>• Enterprise ready: Containerized microservices for on-premises deployment</a:t>
             </a:r>
           </a:p>
           <a:p>
@@ -7401,13 +7401,13 @@
               </a:spcAft>
             </a:pPr>
             <a:r>
-              <a:rPr sz="950">
+              <a:rPr sz="1000">
                 <a:solidFill>
                   <a:srgbClr val="334155"/>
                 </a:solidFill>
                 <a:latin typeface="Arial"/>
               </a:rPr>
-              <a:t>• 100% Data Sovereignty: Zero external data exposure of confidential exploration reserves.</a:t>
+              <a:t>• 100% data sovereignty: Zero external exposure</a:t>
             </a:r>
           </a:p>
           <a:p>
@@ -7426,7 +7426,7 @@
                 </a:solidFill>
                 <a:latin typeface="Arial"/>
               </a:rPr>
-              <a:t>Operational Challenges &amp; Mitigations:</a:t>
+              <a:t>Challenges &amp; Mitigations:</a:t>
             </a:r>
           </a:p>
           <a:p>
@@ -7436,13 +7436,13 @@
               </a:spcAft>
             </a:pPr>
             <a:r>
-              <a:rPr sz="950">
+              <a:rPr sz="1000">
                 <a:solidFill>
                   <a:srgbClr val="334155"/>
                 </a:solidFill>
                 <a:latin typeface="Arial"/>
               </a:rPr>
-              <a:t>• API Rate Limiting: Resilient token budgeting (2200 max tokens) with exponential backoff retry.</a:t>
+              <a:t>• API Rate Limiting: Resilient token budgeting with exponential backoff</a:t>
             </a:r>
           </a:p>
           <a:p>
@@ -7452,13 +7452,13 @@
               </a:spcAft>
             </a:pPr>
             <a:r>
-              <a:rPr sz="950">
+              <a:rPr sz="1000">
                 <a:solidFill>
                   <a:srgbClr val="334155"/>
                 </a:solidFill>
                 <a:latin typeface="Arial"/>
               </a:rPr>
-              <a:t>• Network Outage Tolerance: Local extractive fallback ensures zero system downtime.</a:t>
+              <a:t>• Network Outages: Local extractive fallback ensures zero downtime</a:t>
             </a:r>
           </a:p>
           <a:p>
@@ -7468,13 +7468,13 @@
               </a:spcAft>
             </a:pPr>
             <a:r>
-              <a:rPr sz="950">
+              <a:rPr sz="1000">
                 <a:solidFill>
                   <a:srgbClr val="334155"/>
                 </a:solidFill>
                 <a:latin typeface="Arial"/>
               </a:rPr>
-              <a:t>• Heterogeneous Archives: PyMuPDF token normalization adapts to any PDF format or scan geometry.</a:t>
+              <a:t>• Heterogeneous Archives: PyMuPDF token normalization adapts to any PDF format</a:t>
             </a:r>
           </a:p>
         </p:txBody>
@@ -7534,7 +7534,7 @@
               </a:defRPr>
             </a:pPr>
             <a:r>
-              <a:t>Figure 3: Official Document Repository &amp; Ingestion Hub (ChromaDB Vector Indexing &amp; Live Scraper)</a:t>
+              <a:t>Figure 3: Document Repository &amp; ChromaDB Vector Indexing Hub</a:t>
             </a:r>
           </a:p>
         </p:txBody>
@@ -7953,7 +7953,7 @@
                 </a:solidFill>
                 <a:latin typeface="Arial"/>
               </a:rPr>
-              <a:t>Direct Impact on Target Stakeholders:</a:t>
+              <a:t>Target Impact:</a:t>
             </a:r>
           </a:p>
           <a:p>
@@ -7963,13 +7963,13 @@
               </a:spcAft>
             </a:pPr>
             <a:r>
-              <a:rPr sz="950">
+              <a:rPr sz="1000">
                 <a:solidFill>
                   <a:srgbClr val="334155"/>
                 </a:solidFill>
                 <a:latin typeface="Arial"/>
               </a:rPr>
-              <a:t>• CMPDI Geologists: Instant lookup of Gondwana stratigraphy, Barakar formations, and regional meterage.</a:t>
+              <a:t>• CMPDI Geologists: Instant lookup of Gondwana stratigraphy &amp; regional meterage</a:t>
             </a:r>
           </a:p>
           <a:p>
@@ -7979,13 +7979,13 @@
               </a:spcAft>
             </a:pPr>
             <a:r>
-              <a:rPr sz="950">
+              <a:rPr sz="1000">
                 <a:solidFill>
                   <a:srgbClr val="334155"/>
                 </a:solidFill>
                 <a:latin typeface="Arial"/>
               </a:rPr>
-              <a:t>• Mine Planning Officers: Real-time tracking of Overburden Removal (OBR), stripping ratios, and productivity.</a:t>
+              <a:t>• Mine Planning Officers: Real-time OBR tracking &amp; stripping ratios</a:t>
             </a:r>
           </a:p>
           <a:p>
@@ -7995,13 +7995,13 @@
               </a:spcAft>
             </a:pPr>
             <a:r>
-              <a:rPr sz="950">
+              <a:rPr sz="1000">
                 <a:solidFill>
                   <a:srgbClr val="334155"/>
                 </a:solidFill>
                 <a:latin typeface="Arial"/>
               </a:rPr>
-              <a:t>• Ministry of Coal Leadership: Board-level summaries compiled in minutes rather than weeks.</a:t>
+              <a:t>• Ministry Leadership: Board-level summaries in minutes vs weeks</a:t>
             </a:r>
           </a:p>
           <a:p>
@@ -8020,7 +8020,7 @@
                 </a:solidFill>
                 <a:latin typeface="Arial"/>
               </a:rPr>
-              <a:t>Quantifiable Strategic Benefits:</a:t>
+              <a:t>Strategic Benefits:</a:t>
             </a:r>
           </a:p>
           <a:p>
@@ -8030,13 +8030,13 @@
               </a:spcAft>
             </a:pPr>
             <a:r>
-              <a:rPr sz="950">
+              <a:rPr sz="1000">
                 <a:solidFill>
                   <a:srgbClr val="334155"/>
                 </a:solidFill>
                 <a:latin typeface="Arial"/>
               </a:rPr>
-              <a:t>• 85% Time Savings: Accelerates technical assessment and Detailed Project Report (DPR) evaluation.</a:t>
+              <a:t>• 85% Time Savings: Accelerated DPR evaluation &amp; technical assessment</a:t>
             </a:r>
           </a:p>
           <a:p>
@@ -8046,13 +8046,13 @@
               </a:spcAft>
             </a:pPr>
             <a:r>
-              <a:rPr sz="950">
+              <a:rPr sz="1000">
                 <a:solidFill>
                   <a:srgbClr val="334155"/>
                 </a:solidFill>
                 <a:latin typeface="Arial"/>
               </a:rPr>
-              <a:t>• Auditable Provenance: Spatial bounding boxes eliminate regulatory disputes and non-compliance risk.</a:t>
+              <a:t>• Auditable Provenance: Spatial bounding boxes eliminate compliance risk</a:t>
             </a:r>
           </a:p>
           <a:p>
@@ -8062,13 +8062,13 @@
               </a:spcAft>
             </a:pPr>
             <a:r>
-              <a:rPr sz="950">
+              <a:rPr sz="1000">
                 <a:solidFill>
                   <a:srgbClr val="334155"/>
                 </a:solidFill>
                 <a:latin typeface="Arial"/>
               </a:rPr>
-              <a:t>• Pan-CIL Scalability: Turnkey deployment across all 8 Coal India operational subsidiaries.</a:t>
+              <a:t>• Pan-CIL Scalability: Turnkey deployment across all 8 subsidiaries</a:t>
             </a:r>
           </a:p>
           <a:p>
@@ -8078,13 +8078,13 @@
               </a:spcAft>
             </a:pPr>
             <a:r>
-              <a:rPr sz="950">
+              <a:rPr sz="1000">
                 <a:solidFill>
                   <a:srgbClr val="334155"/>
                 </a:solidFill>
                 <a:latin typeface="Arial"/>
               </a:rPr>
-              <a:t>• Zero Cloud Licensing: Fully self-contained stack with zero per-query commercial subscriptions.</a:t>
+              <a:t>• Zero Cloud Licensing: Self-contained stack with no per-query fees</a:t>
             </a:r>
           </a:p>
         </p:txBody>
@@ -8144,7 +8144,7 @@
               </a:defRPr>
             </a:pPr>
             <a:r>
-              <a:t>Figure 4: Geological Analytics Word Cloud &amp; Subsidiary Production Metrics Dashboard</a:t>
+              <a:t>Figure 4: Analytics Word Cloud &amp; Subsidiary Production Dashboard</a:t>
             </a:r>
           </a:p>
         </p:txBody>
@@ -8563,7 +8563,7 @@
                 </a:solidFill>
                 <a:latin typeface="Arial"/>
               </a:rPr>
-              <a:t>Project Repository &amp; Reference Documentation:</a:t>
+              <a:t>References:</a:t>
             </a:r>
           </a:p>
           <a:p>
@@ -8573,13 +8573,13 @@
               </a:spcAft>
             </a:pPr>
             <a:r>
-              <a:rPr sz="1000" b="1">
+              <a:rPr sz="1050" b="1">
                 <a:solidFill>
                   <a:srgbClr val="0E7490"/>
                 </a:solidFill>
                 <a:latin typeface="Arial"/>
               </a:rPr>
-              <a:t>• GitHub Repository: https://github.com/Sankar7567/data_miners (Full source code, API, and setup guide).</a:t>
+              <a:t>• GitHub Repository: https://github.com/Sankar7567/data_miners</a:t>
             </a:r>
           </a:p>
           <a:p>
@@ -8589,13 +8589,13 @@
               </a:spcAft>
             </a:pPr>
             <a:r>
-              <a:rPr sz="1000">
+              <a:rPr sz="1050">
                 <a:solidFill>
                   <a:srgbClr val="334155"/>
                 </a:solidFill>
                 <a:latin typeface="Arial"/>
               </a:rPr>
-              <a:t>• Ministry of Coal, GoI: Guidelines for Preparation of Mine Plans &amp; Mine Closure Plans — coal.gov.in</a:t>
+              <a:t>• Ministry of Coal: Mine Plans &amp; Closure Guidelines — coal.gov.in</a:t>
             </a:r>
           </a:p>
           <a:p>
@@ -8605,13 +8605,13 @@
               </a:spcAft>
             </a:pPr>
             <a:r>
-              <a:rPr sz="1000">
+              <a:rPr sz="1050">
                 <a:solidFill>
                   <a:srgbClr val="334155"/>
                 </a:solidFill>
                 <a:latin typeface="Arial"/>
               </a:rPr>
-              <a:t>• Central Mine Planning &amp; Design Institute (CMPDI): Annual Geological Exploration &amp; Drilling Reports — cmpdi.co.in</a:t>
+              <a:t>• CMPDI: Geological Exploration &amp; Drilling Reports — cmpdi.co.in</a:t>
             </a:r>
           </a:p>
           <a:p>
@@ -8621,13 +8621,13 @@
               </a:spcAft>
             </a:pPr>
             <a:r>
-              <a:rPr sz="1000">
+              <a:rPr sz="1050">
                 <a:solidFill>
                   <a:srgbClr val="334155"/>
                 </a:solidFill>
                 <a:latin typeface="Arial"/>
               </a:rPr>
-              <a:t>• Coal India Limited (CIL): Operational Performance Reviews &amp; Business Responsibility Reports — coalindia.in</a:t>
+              <a:t>• Coal India Limited: Performance Reviews &amp; BRSR — coalindia.in</a:t>
             </a:r>
           </a:p>
           <a:p>
@@ -8637,13 +8637,13 @@
               </a:spcAft>
             </a:pPr>
             <a:r>
-              <a:rPr sz="1000">
+              <a:rPr sz="1050">
                 <a:solidFill>
                   <a:srgbClr val="334155"/>
                 </a:solidFill>
                 <a:latin typeface="Arial"/>
               </a:rPr>
-              <a:t>• Directorate General of Mines Safety (DGMS): Statutory Operational Guidelines &amp; Safety Circulars.</a:t>
+              <a:t>• DGMS: Statutory Operational Guidelines &amp; Safety Circulars</a:t>
             </a:r>
           </a:p>
           <a:p>
@@ -8653,13 +8653,13 @@
               </a:spcAft>
             </a:pPr>
             <a:r>
-              <a:rPr sz="1000">
+              <a:rPr sz="1050">
                 <a:solidFill>
                   <a:srgbClr val="334155"/>
                 </a:solidFill>
                 <a:latin typeface="Arial"/>
               </a:rPr>
-              <a:t>• PyMuPDF &amp; ChromaDB: Open-source spatial coordinate extraction and high-density vector retrieval.</a:t>
+              <a:t>• PyMuPDF &amp; ChromaDB: Spatial extraction &amp; vector retrieval</a:t>
             </a:r>
           </a:p>
         </p:txBody>
@@ -8719,7 +8719,7 @@
               </a:defRPr>
             </a:pPr>
             <a:r>
-              <a:t>Figure 5: Autonomous Report Studio with Custom Engineering Directives &amp; Multi-Format Synthesis</a:t>
+              <a:t>Figure 5: Autonomous Report Studio with Multi-Format Synthesis</a:t>
             </a:r>
           </a:p>
         </p:txBody>
